--- a/week10/Wk10_Slides.pptx
+++ b/week10/Wk10_Slides.pptx
@@ -30433,7 +30433,7 @@
                   <a:srgbClr val="C00000"/>
                 </a:solidFill>
               </a:rPr>
-              <a:t>Sets vs Maps: Tree-based vs </a:t>
+              <a:t>Sets and Maps: Tree-based vs </a:t>
             </a:r>
             <a:r>
               <a:rPr lang="en-US" dirty="0" err="1">
